--- a/2026_Б_ПІ_ ПЗПІ-22-5 _Разіньков_Є_О.pptx
+++ b/2026_Б_ПІ_ ПЗПІ-22-5 _Разіньков_Є_О.pptx
@@ -8,22 +8,22 @@
     <p:notesMasterId r:id="rId18"/>
   </p:notesMasterIdLst>
   <p:sldIdLst>
-    <p:sldId id="256" r:id="rId2"/>
-    <p:sldId id="257" r:id="rId3"/>
-    <p:sldId id="258" r:id="rId4"/>
-    <p:sldId id="259" r:id="rId5"/>
-    <p:sldId id="260" r:id="rId6"/>
-    <p:sldId id="261" r:id="rId7"/>
-    <p:sldId id="262" r:id="rId8"/>
-    <p:sldId id="263" r:id="rId9"/>
-    <p:sldId id="264" r:id="rId10"/>
-    <p:sldId id="265" r:id="rId11"/>
-    <p:sldId id="266" r:id="rId12"/>
-    <p:sldId id="267" r:id="rId13"/>
-    <p:sldId id="268" r:id="rId14"/>
-    <p:sldId id="269" r:id="rId15"/>
-    <p:sldId id="270" r:id="rId16"/>
-    <p:sldId id="271" r:id="rId17"/>
+    <p:sldId id="288" r:id="rId2"/>
+    <p:sldId id="290" r:id="rId3"/>
+    <p:sldId id="289" r:id="rId4"/>
+    <p:sldId id="291" r:id="rId5"/>
+    <p:sldId id="292" r:id="rId6"/>
+    <p:sldId id="293" r:id="rId7"/>
+    <p:sldId id="294" r:id="rId8"/>
+    <p:sldId id="295" r:id="rId9"/>
+    <p:sldId id="296" r:id="rId10"/>
+    <p:sldId id="297" r:id="rId11"/>
+    <p:sldId id="298" r:id="rId12"/>
+    <p:sldId id="299" r:id="rId13"/>
+    <p:sldId id="300" r:id="rId14"/>
+    <p:sldId id="301" r:id="rId15"/>
+    <p:sldId id="302" r:id="rId16"/>
+    <p:sldId id="303" r:id="rId17"/>
   </p:sldIdLst>
   <p:sldSz cx="12192000" cy="6858000"/>
   <p:notesSz cx="6858000" cy="12192000"/>
@@ -1364,7 +1364,7 @@
             <a:r>
               <a:rPr lang="en-US" sz="1000" b="1" kern="0" spc="200" dirty="0">
                 <a:solidFill>
-                  <a:srgbClr val="7D8393"/>
+                  <a:srgbClr val="F2F2F2"/>
                 </a:solidFill>
                 <a:latin typeface="Arial" pitchFamily="34" charset="0"/>
                 <a:ea typeface="Arial" pitchFamily="34" charset="-122"/>
@@ -1403,7 +1403,7 @@
             <a:r>
               <a:rPr lang="en-US" sz="1300" dirty="0">
                 <a:solidFill>
-                  <a:srgbClr val="B7BCC7"/>
+                  <a:srgbClr val="F2F2F2"/>
                 </a:solidFill>
                 <a:latin typeface="Arial" pitchFamily="34" charset="0"/>
                 <a:ea typeface="Arial" pitchFamily="34" charset="-122"/>
@@ -1567,7 +1567,7 @@
             <a:r>
               <a:rPr lang="en-US" sz="900" b="1" kern="0" spc="150" dirty="0">
                 <a:solidFill>
-                  <a:srgbClr val="7D8393"/>
+                  <a:srgbClr val="F2F2F2"/>
                 </a:solidFill>
                 <a:latin typeface="Arial" pitchFamily="34" charset="0"/>
                 <a:ea typeface="Arial" pitchFamily="34" charset="-122"/>
@@ -1606,7 +1606,7 @@
             <a:r>
               <a:rPr lang="en-US" sz="1100" dirty="0">
                 <a:solidFill>
-                  <a:srgbClr val="B7BCC7"/>
+                  <a:srgbClr val="F2F2F2"/>
                 </a:solidFill>
                 <a:latin typeface="Arial" pitchFamily="34" charset="0"/>
                 <a:ea typeface="Arial" pitchFamily="34" charset="-122"/>
@@ -1684,7 +1684,7 @@
             <a:r>
               <a:rPr lang="en-US" sz="900" b="1" kern="0" spc="150" dirty="0">
                 <a:solidFill>
-                  <a:srgbClr val="7D8393"/>
+                  <a:srgbClr val="F2F2F2"/>
                 </a:solidFill>
                 <a:latin typeface="Arial" pitchFamily="34" charset="0"/>
                 <a:ea typeface="Arial" pitchFamily="34" charset="-122"/>
@@ -1723,7 +1723,7 @@
             <a:r>
               <a:rPr lang="en-US" sz="1100" dirty="0">
                 <a:solidFill>
-                  <a:srgbClr val="B7BCC7"/>
+                  <a:srgbClr val="F2F2F2"/>
                 </a:solidFill>
                 <a:latin typeface="Arial" pitchFamily="34" charset="0"/>
                 <a:ea typeface="Arial" pitchFamily="34" charset="-122"/>
@@ -1856,7 +1856,7 @@
             <a:r>
               <a:rPr sz="1400" b="0" i="0" dirty="0">
                 <a:solidFill>
-                  <a:srgbClr val="7D8393"/>
+                  <a:srgbClr val="FFFFFF"/>
                 </a:solidFill>
                 <a:latin typeface="Arial"/>
               </a:rPr>
@@ -1866,6 +1866,11 @@
         </p:txBody>
       </p:sp>
     </p:spTree>
+    <p:extLst>
+      <p:ext uri="{BB962C8B-B14F-4D97-AF65-F5344CB8AC3E}">
+        <p14:creationId xmlns:p14="http://schemas.microsoft.com/office/powerpoint/2010/main" val="3388159593"/>
+      </p:ext>
+    </p:extLst>
   </p:cSld>
   <p:clrMapOvr>
     <a:masterClrMapping/>
@@ -2040,7 +2045,7 @@
             <a:r>
               <a:rPr sz="1300" b="0" i="0">
                 <a:solidFill>
-                  <a:srgbClr val="B7BCC7"/>
+                  <a:srgbClr val="F2F2F2"/>
                 </a:solidFill>
                 <a:latin typeface="Arial"/>
               </a:rPr>
@@ -2212,7 +2217,7 @@
             <a:r>
               <a:rPr sz="1050" b="0" i="0">
                 <a:solidFill>
-                  <a:srgbClr val="B7BCC7"/>
+                  <a:srgbClr val="F2F2F2"/>
                 </a:solidFill>
                 <a:latin typeface="Arial"/>
               </a:rPr>
@@ -2384,7 +2389,7 @@
             <a:r>
               <a:rPr sz="1050" b="0" i="0">
                 <a:solidFill>
-                  <a:srgbClr val="B7BCC7"/>
+                  <a:srgbClr val="F2F2F2"/>
                 </a:solidFill>
                 <a:latin typeface="Arial"/>
               </a:rPr>
@@ -2556,7 +2561,7 @@
             <a:r>
               <a:rPr sz="1050" b="0" i="0">
                 <a:solidFill>
-                  <a:srgbClr val="B7BCC7"/>
+                  <a:srgbClr val="F2F2F2"/>
                 </a:solidFill>
                 <a:latin typeface="Arial"/>
               </a:rPr>
@@ -2688,7 +2693,7 @@
             <a:r>
               <a:rPr sz="1050" b="1" i="0">
                 <a:solidFill>
-                  <a:srgbClr val="7D8393"/>
+                  <a:srgbClr val="F2F2F2"/>
                 </a:solidFill>
                 <a:latin typeface="Arial"/>
               </a:rPr>
@@ -2697,33 +2702,6 @@
           </a:p>
         </p:txBody>
       </p:sp>
-      <p:pic>
-        <p:nvPicPr>
-          <p:cNvPr id="29" name="Picture 28" descr="gateway_final2.png"/>
-          <p:cNvPicPr>
-            <a:picLocks noChangeAspect="1"/>
-          </p:cNvPicPr>
-          <p:nvPr/>
-        </p:nvPicPr>
-        <p:blipFill>
-          <a:blip r:embed="rId2"/>
-          <a:stretch>
-            <a:fillRect/>
-          </a:stretch>
-        </p:blipFill>
-        <p:spPr>
-          <a:xfrm>
-            <a:off x="1542934" y="2048256"/>
-            <a:ext cx="5445695" cy="2816431"/>
-          </a:xfrm>
-          <a:prstGeom prst="rect">
-            <a:avLst/>
-          </a:prstGeom>
-          <a:ln>
-            <a:noFill/>
-          </a:ln>
-        </p:spPr>
-      </p:pic>
       <p:sp>
         <p:nvSpPr>
           <p:cNvPr id="30" name="Rounded Rectangle 29"/>
@@ -2865,7 +2843,7 @@
           <p:nvPr/>
         </p:nvPicPr>
         <p:blipFill>
-          <a:blip r:embed="rId3"/>
+          <a:blip r:embed="rId2"/>
           <a:stretch>
             <a:fillRect/>
           </a:stretch>
@@ -2918,7 +2896,7 @@
             <a:r>
               <a:rPr sz="1400" b="0" i="0" dirty="0">
                 <a:solidFill>
-                  <a:srgbClr val="7D8393"/>
+                  <a:srgbClr val="F2F2F2"/>
                 </a:solidFill>
                 <a:latin typeface="Arial"/>
               </a:rPr>
@@ -2927,7 +2905,7 @@
             <a:r>
               <a:rPr lang="ru-RU" sz="1400" b="0" i="0" dirty="0">
                 <a:solidFill>
-                  <a:srgbClr val="7D8393"/>
+                  <a:srgbClr val="F2F2F2"/>
                 </a:solidFill>
                 <a:latin typeface="Arial"/>
               </a:rPr>
@@ -2935,14 +2913,49 @@
             </a:r>
             <a:endParaRPr sz="1400" b="0" i="0" dirty="0">
               <a:solidFill>
-                <a:srgbClr val="7D8393"/>
+                <a:srgbClr val="F2F2F2"/>
               </a:solidFill>
               <a:latin typeface="Arial"/>
             </a:endParaRPr>
           </a:p>
         </p:txBody>
       </p:sp>
+      <p:pic>
+        <p:nvPicPr>
+          <p:cNvPr id="8" name="Рисунок 7">
+            <a:extLst>
+              <a:ext uri="{FF2B5EF4-FFF2-40B4-BE49-F238E27FC236}">
+                <a16:creationId xmlns:a16="http://schemas.microsoft.com/office/drawing/2014/main" id="{4C6408A8-BA0B-52D5-414F-1513A769B1FD}"/>
+              </a:ext>
+            </a:extLst>
+          </p:cNvPr>
+          <p:cNvPicPr>
+            <a:picLocks noChangeAspect="1"/>
+          </p:cNvPicPr>
+          <p:nvPr/>
+        </p:nvPicPr>
+        <p:blipFill>
+          <a:blip r:embed="rId3"/>
+          <a:stretch>
+            <a:fillRect/>
+          </a:stretch>
+        </p:blipFill>
+        <p:spPr>
+          <a:xfrm>
+            <a:off x="1302878" y="2029968"/>
+            <a:ext cx="5395243" cy="2790338"/>
+          </a:xfrm>
+          <a:prstGeom prst="rect">
+            <a:avLst/>
+          </a:prstGeom>
+        </p:spPr>
+      </p:pic>
     </p:spTree>
+    <p:extLst>
+      <p:ext uri="{BB962C8B-B14F-4D97-AF65-F5344CB8AC3E}">
+        <p14:creationId xmlns:p14="http://schemas.microsoft.com/office/powerpoint/2010/main" val="3583346206"/>
+      </p:ext>
+    </p:extLst>
   </p:cSld>
   <p:clrMapOvr>
     <a:masterClrMapping/>
@@ -3117,7 +3130,7 @@
             <a:r>
               <a:rPr sz="1300" b="0" i="0">
                 <a:solidFill>
-                  <a:srgbClr val="B7BCC7"/>
+                  <a:srgbClr val="F2F2F2"/>
                 </a:solidFill>
                 <a:latin typeface="Arial"/>
               </a:rPr>
@@ -3289,7 +3302,7 @@
             <a:r>
               <a:rPr sz="1050" b="0" i="0">
                 <a:solidFill>
-                  <a:srgbClr val="B7BCC7"/>
+                  <a:srgbClr val="F2F2F2"/>
                 </a:solidFill>
                 <a:latin typeface="Arial"/>
               </a:rPr>
@@ -3461,7 +3474,7 @@
             <a:r>
               <a:rPr sz="1050" b="0" i="0">
                 <a:solidFill>
-                  <a:srgbClr val="B7BCC7"/>
+                  <a:srgbClr val="F2F2F2"/>
                 </a:solidFill>
                 <a:latin typeface="Arial"/>
               </a:rPr>
@@ -3633,7 +3646,7 @@
             <a:r>
               <a:rPr sz="1050" b="0" i="0">
                 <a:solidFill>
-                  <a:srgbClr val="B7BCC7"/>
+                  <a:srgbClr val="F2F2F2"/>
                 </a:solidFill>
                 <a:latin typeface="Arial"/>
               </a:rPr>
@@ -3671,7 +3684,7 @@
             <a:r>
               <a:rPr sz="1000" b="0" i="1">
                 <a:solidFill>
-                  <a:srgbClr val="7D8393"/>
+                  <a:srgbClr val="F2F2F2"/>
                 </a:solidFill>
                 <a:latin typeface="Arial"/>
               </a:rPr>
@@ -3742,7 +3755,7 @@
             <a:r>
               <a:rPr sz="1400" b="0" i="0" dirty="0">
                 <a:solidFill>
-                  <a:srgbClr val="7D8393"/>
+                  <a:srgbClr val="F2F2F2"/>
                 </a:solidFill>
                 <a:latin typeface="Arial"/>
               </a:rPr>
@@ -3751,7 +3764,7 @@
             <a:r>
               <a:rPr lang="ru-RU" sz="1400" b="0" i="0" dirty="0">
                 <a:solidFill>
-                  <a:srgbClr val="7D8393"/>
+                  <a:srgbClr val="F2F2F2"/>
                 </a:solidFill>
                 <a:latin typeface="Arial"/>
               </a:rPr>
@@ -3759,7 +3772,7 @@
             </a:r>
             <a:endParaRPr sz="1400" b="0" i="0" dirty="0">
               <a:solidFill>
-                <a:srgbClr val="7D8393"/>
+                <a:srgbClr val="F2F2F2"/>
               </a:solidFill>
               <a:latin typeface="Arial"/>
             </a:endParaRPr>
@@ -3767,6 +3780,11 @@
         </p:txBody>
       </p:sp>
     </p:spTree>
+    <p:extLst>
+      <p:ext uri="{BB962C8B-B14F-4D97-AF65-F5344CB8AC3E}">
+        <p14:creationId xmlns:p14="http://schemas.microsoft.com/office/powerpoint/2010/main" val="4144668319"/>
+      </p:ext>
+    </p:extLst>
   </p:cSld>
   <p:clrMapOvr>
     <a:masterClrMapping/>
@@ -3935,7 +3953,7 @@
             <a:r>
               <a:rPr sz="1300" b="0" i="0">
                 <a:solidFill>
-                  <a:srgbClr val="B7BCC7"/>
+                  <a:srgbClr val="F2F2F2"/>
                 </a:solidFill>
                 <a:latin typeface="Arial"/>
               </a:rPr>
@@ -4183,7 +4201,7 @@
             <a:r>
               <a:rPr sz="1030" b="0" i="0">
                 <a:solidFill>
-                  <a:srgbClr val="B7BCC7"/>
+                  <a:srgbClr val="F2F2F2"/>
                 </a:solidFill>
                 <a:latin typeface="Arial"/>
               </a:rPr>
@@ -4359,7 +4377,7 @@
             <a:r>
               <a:rPr sz="1030" b="0" i="0">
                 <a:solidFill>
-                  <a:srgbClr val="B7BCC7"/>
+                  <a:srgbClr val="F2F2F2"/>
                 </a:solidFill>
                 <a:latin typeface="Arial"/>
               </a:rPr>
@@ -4535,7 +4553,7 @@
             <a:r>
               <a:rPr sz="1030" b="0" i="0">
                 <a:solidFill>
-                  <a:srgbClr val="B7BCC7"/>
+                  <a:srgbClr val="F2F2F2"/>
                 </a:solidFill>
                 <a:latin typeface="Arial"/>
               </a:rPr>
@@ -4711,7 +4729,7 @@
             <a:r>
               <a:rPr sz="1030" b="0" i="0">
                 <a:solidFill>
-                  <a:srgbClr val="B7BCC7"/>
+                  <a:srgbClr val="F2F2F2"/>
                 </a:solidFill>
                 <a:latin typeface="Arial"/>
               </a:rPr>
@@ -4859,7 +4877,7 @@
             <a:r>
               <a:rPr sz="1400" b="0" i="0" dirty="0">
                 <a:solidFill>
-                  <a:srgbClr val="7D8393"/>
+                  <a:srgbClr val="F2F2F2"/>
                 </a:solidFill>
                 <a:latin typeface="Arial"/>
               </a:rPr>
@@ -4868,7 +4886,7 @@
             <a:r>
               <a:rPr lang="ru-RU" sz="1400" b="0" i="0" dirty="0">
                 <a:solidFill>
-                  <a:srgbClr val="7D8393"/>
+                  <a:srgbClr val="F2F2F2"/>
                 </a:solidFill>
                 <a:latin typeface="Arial"/>
               </a:rPr>
@@ -4876,7 +4894,7 @@
             </a:r>
             <a:endParaRPr sz="1400" b="0" i="0" dirty="0">
               <a:solidFill>
-                <a:srgbClr val="7D8393"/>
+                <a:srgbClr val="F2F2F2"/>
               </a:solidFill>
               <a:latin typeface="Arial"/>
             </a:endParaRPr>
@@ -4884,6 +4902,11 @@
         </p:txBody>
       </p:sp>
     </p:spTree>
+    <p:extLst>
+      <p:ext uri="{BB962C8B-B14F-4D97-AF65-F5344CB8AC3E}">
+        <p14:creationId xmlns:p14="http://schemas.microsoft.com/office/powerpoint/2010/main" val="1772204885"/>
+      </p:ext>
+    </p:extLst>
   </p:cSld>
   <p:clrMapOvr>
     <a:masterClrMapping/>
@@ -5052,7 +5075,7 @@
             <a:r>
               <a:rPr lang="uk-UA" sz="1300" b="0" i="0" noProof="1">
                 <a:solidFill>
-                  <a:srgbClr val="B7BCC7"/>
+                  <a:srgbClr val="F2F2F2"/>
                 </a:solidFill>
                 <a:latin typeface="Arial"/>
               </a:rPr>
@@ -5384,7 +5407,7 @@
             <a:r>
               <a:rPr lang="uk-UA" sz="1150" b="0" i="1" noProof="1">
                 <a:solidFill>
-                  <a:srgbClr val="B7BCC7"/>
+                  <a:srgbClr val="F2F2F2"/>
                 </a:solidFill>
                 <a:latin typeface="Arial"/>
               </a:rPr>
@@ -5496,7 +5519,7 @@
             <a:r>
               <a:rPr lang="uk-UA" sz="1050" b="0" i="0" noProof="1">
                 <a:solidFill>
-                  <a:srgbClr val="B7BCC7"/>
+                  <a:srgbClr val="F2F2F2"/>
                 </a:solidFill>
                 <a:latin typeface="Arial"/>
               </a:rPr>
@@ -5608,7 +5631,7 @@
             <a:r>
               <a:rPr lang="uk-UA" sz="1050" b="0" i="0" noProof="1">
                 <a:solidFill>
-                  <a:srgbClr val="B7BCC7"/>
+                  <a:srgbClr val="F2F2F2"/>
                 </a:solidFill>
                 <a:latin typeface="Arial"/>
               </a:rPr>
@@ -5720,7 +5743,7 @@
             <a:r>
               <a:rPr lang="uk-UA" sz="1050" b="0" i="0" noProof="1">
                 <a:solidFill>
-                  <a:srgbClr val="B7BCC7"/>
+                  <a:srgbClr val="F2F2F2"/>
                 </a:solidFill>
                 <a:latin typeface="Arial"/>
               </a:rPr>
@@ -5764,7 +5787,7 @@
             <a:r>
               <a:rPr lang="uk-UA" sz="1400" b="0" i="0" noProof="1">
                 <a:solidFill>
-                  <a:srgbClr val="7D8393"/>
+                  <a:srgbClr val="F2F2F2"/>
                 </a:solidFill>
                 <a:latin typeface="Arial"/>
               </a:rPr>
@@ -5774,6 +5797,11 @@
         </p:txBody>
       </p:sp>
     </p:spTree>
+    <p:extLst>
+      <p:ext uri="{BB962C8B-B14F-4D97-AF65-F5344CB8AC3E}">
+        <p14:creationId xmlns:p14="http://schemas.microsoft.com/office/powerpoint/2010/main" val="3219952929"/>
+      </p:ext>
+    </p:extLst>
   </p:cSld>
   <p:clrMapOvr>
     <a:masterClrMapping/>
@@ -5942,7 +5970,7 @@
             <a:r>
               <a:rPr sz="1300" b="0" i="0">
                 <a:solidFill>
-                  <a:srgbClr val="B7BCC7"/>
+                  <a:srgbClr val="F2F2F2"/>
                 </a:solidFill>
                 <a:latin typeface="Arial"/>
               </a:rPr>
@@ -6024,7 +6052,7 @@
             <a:r>
               <a:rPr sz="1050" b="1" i="0">
                 <a:solidFill>
-                  <a:srgbClr val="7D8393"/>
+                  <a:srgbClr val="F2F2F2"/>
                 </a:solidFill>
                 <a:latin typeface="Arial"/>
               </a:rPr>
@@ -6223,7 +6251,7 @@
             <a:r>
               <a:rPr sz="980" b="0" i="0">
                 <a:solidFill>
-                  <a:srgbClr val="B7BCC7"/>
+                  <a:srgbClr val="F2F2F2"/>
                 </a:solidFill>
                 <a:latin typeface="Arial"/>
               </a:rPr>
@@ -6293,7 +6321,7 @@
             <a:r>
               <a:rPr sz="980" b="0" i="0">
                 <a:solidFill>
-                  <a:srgbClr val="B7BCC7"/>
+                  <a:srgbClr val="F2F2F2"/>
                 </a:solidFill>
                 <a:latin typeface="Arial"/>
               </a:rPr>
@@ -6363,7 +6391,7 @@
             <a:r>
               <a:rPr sz="980" b="0" i="0">
                 <a:solidFill>
-                  <a:srgbClr val="B7BCC7"/>
+                  <a:srgbClr val="F2F2F2"/>
                 </a:solidFill>
                 <a:latin typeface="Arial"/>
               </a:rPr>
@@ -6433,7 +6461,7 @@
             <a:r>
               <a:rPr sz="980" b="0" i="0">
                 <a:solidFill>
-                  <a:srgbClr val="B7BCC7"/>
+                  <a:srgbClr val="F2F2F2"/>
                 </a:solidFill>
                 <a:latin typeface="Arial"/>
               </a:rPr>
@@ -6634,7 +6662,7 @@
             <a:r>
               <a:rPr sz="1000" b="0" i="0">
                 <a:solidFill>
-                  <a:srgbClr val="B7BCC7"/>
+                  <a:srgbClr val="F2F2F2"/>
                 </a:solidFill>
                 <a:latin typeface="Arial"/>
               </a:rPr>
@@ -6835,7 +6863,7 @@
             <a:r>
               <a:rPr sz="1000" b="0" i="0">
                 <a:solidFill>
-                  <a:srgbClr val="B7BCC7"/>
+                  <a:srgbClr val="F2F2F2"/>
                 </a:solidFill>
                 <a:latin typeface="Arial"/>
               </a:rPr>
@@ -7036,7 +7064,7 @@
             <a:r>
               <a:rPr sz="1000" b="0" i="0">
                 <a:solidFill>
-                  <a:srgbClr val="B7BCC7"/>
+                  <a:srgbClr val="F2F2F2"/>
                 </a:solidFill>
                 <a:latin typeface="Arial"/>
               </a:rPr>
@@ -7191,7 +7219,7 @@
             <a:r>
               <a:rPr sz="1400" b="0" i="0" dirty="0">
                 <a:solidFill>
-                  <a:srgbClr val="7D8393"/>
+                  <a:srgbClr val="F2F2F2"/>
                 </a:solidFill>
                 <a:latin typeface="Arial"/>
               </a:rPr>
@@ -7200,7 +7228,7 @@
             <a:r>
               <a:rPr lang="ru-RU" sz="1400" b="0" i="0" dirty="0">
                 <a:solidFill>
-                  <a:srgbClr val="7D8393"/>
+                  <a:srgbClr val="F2F2F2"/>
                 </a:solidFill>
                 <a:latin typeface="Arial"/>
               </a:rPr>
@@ -7208,7 +7236,7 @@
             </a:r>
             <a:endParaRPr sz="1400" b="0" i="0" dirty="0">
               <a:solidFill>
-                <a:srgbClr val="7D8393"/>
+                <a:srgbClr val="F2F2F2"/>
               </a:solidFill>
               <a:latin typeface="Arial"/>
             </a:endParaRPr>
@@ -7216,6 +7244,11 @@
         </p:txBody>
       </p:sp>
     </p:spTree>
+    <p:extLst>
+      <p:ext uri="{BB962C8B-B14F-4D97-AF65-F5344CB8AC3E}">
+        <p14:creationId xmlns:p14="http://schemas.microsoft.com/office/powerpoint/2010/main" val="1107097592"/>
+      </p:ext>
+    </p:extLst>
   </p:cSld>
   <p:clrMapOvr>
     <a:masterClrMapping/>
@@ -7384,7 +7417,7 @@
             <a:r>
               <a:rPr sz="1300" b="0" i="0">
                 <a:solidFill>
-                  <a:srgbClr val="B7BCC7"/>
+                  <a:srgbClr val="F2F2F2"/>
                 </a:solidFill>
                 <a:latin typeface="Arial"/>
               </a:rPr>
@@ -7540,7 +7573,7 @@
             <a:r>
               <a:rPr sz="980" b="0" i="0">
                 <a:solidFill>
-                  <a:srgbClr val="B7BCC7"/>
+                  <a:srgbClr val="F2F2F2"/>
                 </a:solidFill>
                 <a:latin typeface="Arial"/>
               </a:rPr>
@@ -7661,7 +7694,7 @@
             <a:r>
               <a:rPr sz="980" b="0" i="0">
                 <a:solidFill>
-                  <a:srgbClr val="B7BCC7"/>
+                  <a:srgbClr val="F2F2F2"/>
                 </a:solidFill>
                 <a:latin typeface="Arial"/>
               </a:rPr>
@@ -7782,7 +7815,7 @@
             <a:r>
               <a:rPr sz="980" b="0" i="0">
                 <a:solidFill>
-                  <a:srgbClr val="B7BCC7"/>
+                  <a:srgbClr val="F2F2F2"/>
                 </a:solidFill>
                 <a:latin typeface="Arial"/>
               </a:rPr>
@@ -7903,7 +7936,7 @@
             <a:r>
               <a:rPr sz="980" b="0" i="0">
                 <a:solidFill>
-                  <a:srgbClr val="B7BCC7"/>
+                  <a:srgbClr val="F2F2F2"/>
                 </a:solidFill>
                 <a:latin typeface="Arial"/>
               </a:rPr>
@@ -8022,7 +8055,7 @@
             <a:r>
               <a:rPr sz="1030" b="0" i="0">
                 <a:solidFill>
-                  <a:srgbClr val="B7BCC7"/>
+                  <a:srgbClr val="F2F2F2"/>
                 </a:solidFill>
                 <a:latin typeface="Arial"/>
               </a:rPr>
@@ -8106,7 +8139,7 @@
             <a:r>
               <a:rPr sz="1030" b="0" i="0">
                 <a:solidFill>
-                  <a:srgbClr val="B7BCC7"/>
+                  <a:srgbClr val="F2F2F2"/>
                 </a:solidFill>
                 <a:latin typeface="Arial"/>
               </a:rPr>
@@ -8190,7 +8223,7 @@
             <a:r>
               <a:rPr sz="1030" b="0" i="0">
                 <a:solidFill>
-                  <a:srgbClr val="B7BCC7"/>
+                  <a:srgbClr val="F2F2F2"/>
                 </a:solidFill>
                 <a:latin typeface="Arial"/>
               </a:rPr>
@@ -8274,7 +8307,7 @@
             <a:r>
               <a:rPr sz="1030" b="0" i="0">
                 <a:solidFill>
-                  <a:srgbClr val="B7BCC7"/>
+                  <a:srgbClr val="F2F2F2"/>
                 </a:solidFill>
                 <a:latin typeface="Arial"/>
               </a:rPr>
@@ -8358,7 +8391,7 @@
             <a:r>
               <a:rPr sz="1030" b="0" i="0">
                 <a:solidFill>
-                  <a:srgbClr val="B7BCC7"/>
+                  <a:srgbClr val="F2F2F2"/>
                 </a:solidFill>
                 <a:latin typeface="Arial"/>
               </a:rPr>
@@ -8442,7 +8475,7 @@
             <a:r>
               <a:rPr sz="1030" b="0" i="0">
                 <a:solidFill>
-                  <a:srgbClr val="B7BCC7"/>
+                  <a:srgbClr val="F2F2F2"/>
                 </a:solidFill>
                 <a:latin typeface="Arial"/>
               </a:rPr>
@@ -8563,7 +8596,7 @@
             <a:r>
               <a:rPr sz="980" b="0" i="0">
                 <a:solidFill>
-                  <a:srgbClr val="B7BCC7"/>
+                  <a:srgbClr val="F2F2F2"/>
                 </a:solidFill>
                 <a:latin typeface="Arial"/>
               </a:rPr>
@@ -8684,7 +8717,7 @@
             <a:r>
               <a:rPr sz="980" b="0" i="0">
                 <a:solidFill>
-                  <a:srgbClr val="B7BCC7"/>
+                  <a:srgbClr val="F2F2F2"/>
                 </a:solidFill>
                 <a:latin typeface="Arial"/>
               </a:rPr>
@@ -8805,7 +8838,7 @@
             <a:r>
               <a:rPr sz="980" b="0" i="0">
                 <a:solidFill>
-                  <a:srgbClr val="B7BCC7"/>
+                  <a:srgbClr val="F2F2F2"/>
                 </a:solidFill>
                 <a:latin typeface="Arial"/>
               </a:rPr>
@@ -8849,7 +8882,7 @@
             <a:r>
               <a:rPr sz="1400" b="0" i="0" dirty="0">
                 <a:solidFill>
-                  <a:srgbClr val="7D8393"/>
+                  <a:srgbClr val="F2F2F2"/>
                 </a:solidFill>
                 <a:latin typeface="Arial"/>
               </a:rPr>
@@ -8858,7 +8891,7 @@
             <a:r>
               <a:rPr lang="ru-RU" sz="1400" b="0" i="0" dirty="0">
                 <a:solidFill>
-                  <a:srgbClr val="7D8393"/>
+                  <a:srgbClr val="F2F2F2"/>
                 </a:solidFill>
                 <a:latin typeface="Arial"/>
               </a:rPr>
@@ -8866,7 +8899,7 @@
             </a:r>
             <a:endParaRPr sz="1400" b="0" i="0" dirty="0">
               <a:solidFill>
-                <a:srgbClr val="7D8393"/>
+                <a:srgbClr val="F2F2F2"/>
               </a:solidFill>
               <a:latin typeface="Arial"/>
             </a:endParaRPr>
@@ -8874,6 +8907,11 @@
         </p:txBody>
       </p:sp>
     </p:spTree>
+    <p:extLst>
+      <p:ext uri="{BB962C8B-B14F-4D97-AF65-F5344CB8AC3E}">
+        <p14:creationId xmlns:p14="http://schemas.microsoft.com/office/powerpoint/2010/main" val="2244360306"/>
+      </p:ext>
+    </p:extLst>
   </p:cSld>
   <p:clrMapOvr>
     <a:masterClrMapping/>
@@ -9092,7 +9130,7 @@
             <a:r>
               <a:rPr lang="uk-UA" sz="1150" b="0" i="0" noProof="1">
                 <a:solidFill>
-                  <a:srgbClr val="B7BCC7"/>
+                  <a:srgbClr val="F2F2F2"/>
                 </a:solidFill>
                 <a:latin typeface="Arial"/>
               </a:rPr>
@@ -9258,7 +9296,7 @@
             <a:r>
               <a:rPr lang="uk-UA" sz="1030" b="0" i="0" noProof="1">
                 <a:solidFill>
-                  <a:srgbClr val="B7BCC7"/>
+                  <a:srgbClr val="F2F2F2"/>
                 </a:solidFill>
                 <a:latin typeface="Arial"/>
               </a:rPr>
@@ -9389,7 +9427,7 @@
             <a:r>
               <a:rPr lang="uk-UA" sz="1030" b="0" i="0" noProof="1">
                 <a:solidFill>
-                  <a:srgbClr val="B7BCC7"/>
+                  <a:srgbClr val="F2F2F2"/>
                 </a:solidFill>
                 <a:latin typeface="Arial"/>
               </a:rPr>
@@ -9520,7 +9558,7 @@
             <a:r>
               <a:rPr lang="uk-UA" sz="1030" b="0" i="0" noProof="1">
                 <a:solidFill>
-                  <a:srgbClr val="B7BCC7"/>
+                  <a:srgbClr val="F2F2F2"/>
                 </a:solidFill>
                 <a:latin typeface="Arial"/>
               </a:rPr>
@@ -9651,7 +9689,7 @@
             <a:r>
               <a:rPr lang="uk-UA" sz="1030" b="0" i="0" noProof="1">
                 <a:solidFill>
-                  <a:srgbClr val="B7BCC7"/>
+                  <a:srgbClr val="F2F2F2"/>
                 </a:solidFill>
                 <a:latin typeface="Arial"/>
               </a:rPr>
@@ -9725,7 +9763,7 @@
             <a:r>
               <a:rPr lang="uk-UA" sz="1050" b="0" i="0" noProof="1">
                 <a:solidFill>
-                  <a:srgbClr val="B7BCC7"/>
+                  <a:srgbClr val="F2F2F2"/>
                 </a:solidFill>
                 <a:latin typeface="Arial"/>
               </a:rPr>
@@ -9769,7 +9807,7 @@
             <a:r>
               <a:rPr lang="uk-UA" sz="1400" b="0" i="0" noProof="1">
                 <a:solidFill>
-                  <a:srgbClr val="7D8393"/>
+                  <a:srgbClr val="F2F2F2"/>
                 </a:solidFill>
                 <a:latin typeface="Arial"/>
               </a:rPr>
@@ -9779,6 +9817,11 @@
         </p:txBody>
       </p:sp>
     </p:spTree>
+    <p:extLst>
+      <p:ext uri="{BB962C8B-B14F-4D97-AF65-F5344CB8AC3E}">
+        <p14:creationId xmlns:p14="http://schemas.microsoft.com/office/powerpoint/2010/main" val="3163159687"/>
+      </p:ext>
+    </p:extLst>
   </p:cSld>
   <p:clrMapOvr>
     <a:masterClrMapping/>
@@ -9972,7 +10015,7 @@
             <a:r>
               <a:rPr lang="en-US" sz="1200" dirty="0">
                 <a:solidFill>
-                  <a:srgbClr val="7D8393"/>
+                  <a:srgbClr val="F2F2F2"/>
                 </a:solidFill>
                 <a:latin typeface="Arial" pitchFamily="34" charset="0"/>
                 <a:ea typeface="Arial" pitchFamily="34" charset="-122"/>
@@ -9992,7 +10035,7 @@
             <a:r>
               <a:rPr lang="en-US" sz="1200" dirty="0">
                 <a:solidFill>
-                  <a:srgbClr val="7D8393"/>
+                  <a:srgbClr val="F2F2F2"/>
                 </a:solidFill>
                 <a:latin typeface="Arial" pitchFamily="34" charset="0"/>
                 <a:ea typeface="Arial" pitchFamily="34" charset="-122"/>
@@ -10060,7 +10103,7 @@
             <a:r>
               <a:rPr lang="en-US" sz="1000" b="1" kern="0" spc="140" dirty="0">
                 <a:solidFill>
-                  <a:srgbClr val="7D8393"/>
+                  <a:srgbClr val="F2F2F2"/>
                 </a:solidFill>
                 <a:latin typeface="Arial" pitchFamily="34" charset="0"/>
                 <a:ea typeface="Arial" pitchFamily="34" charset="-122"/>
@@ -10133,13 +10176,37 @@
             <a:r>
               <a:rPr lang="en-US" sz="1250" dirty="0">
                 <a:solidFill>
-                  <a:srgbClr val="B7BCC7"/>
+                  <a:srgbClr val="F2F2F2"/>
                 </a:solidFill>
                 <a:latin typeface="Arial" pitchFamily="34" charset="0"/>
                 <a:ea typeface="Arial" pitchFamily="34" charset="-122"/>
                 <a:cs typeface="Arial" pitchFamily="34" charset="-120"/>
               </a:rPr>
-              <a:t> — капіталізація ринку предметів CS2</a:t>
+              <a:t> — </a:t>
+            </a:r>
+            <a:r>
+              <a:rPr lang="en-US" sz="1250" dirty="0">
+                <a:solidFill>
+                  <a:schemeClr val="bg1">
+                    <a:lumMod val="95000"/>
+                  </a:schemeClr>
+                </a:solidFill>
+                <a:latin typeface="Arial" pitchFamily="34" charset="0"/>
+                <a:ea typeface="Arial" pitchFamily="34" charset="-122"/>
+                <a:cs typeface="Arial" pitchFamily="34" charset="-120"/>
+              </a:rPr>
+              <a:t>капіталізація</a:t>
+            </a:r>
+            <a:r>
+              <a:rPr lang="en-US" sz="1250" dirty="0">
+                <a:solidFill>
+                  <a:srgbClr val="F2F2F2"/>
+                </a:solidFill>
+                <a:latin typeface="Arial" pitchFamily="34" charset="0"/>
+                <a:ea typeface="Arial" pitchFamily="34" charset="-122"/>
+                <a:cs typeface="Arial" pitchFamily="34" charset="-120"/>
+              </a:rPr>
+              <a:t> ринку предметів CS2</a:t>
             </a:r>
             <a:endParaRPr lang="en-US" sz="1250" dirty="0"/>
           </a:p>
@@ -10195,7 +10262,7 @@
             <a:r>
               <a:rPr lang="en-US" sz="1250" dirty="0">
                 <a:solidFill>
-                  <a:srgbClr val="B7BCC7"/>
+                  <a:srgbClr val="F2F2F2"/>
                 </a:solidFill>
                 <a:latin typeface="Arial" pitchFamily="34" charset="0"/>
                 <a:ea typeface="Arial" pitchFamily="34" charset="-122"/>
@@ -10257,7 +10324,7 @@
             <a:r>
               <a:rPr lang="en-US" sz="1250" dirty="0">
                 <a:solidFill>
-                  <a:srgbClr val="B7BCC7"/>
+                  <a:srgbClr val="F2F2F2"/>
                 </a:solidFill>
                 <a:latin typeface="Arial" pitchFamily="34" charset="0"/>
                 <a:ea typeface="Arial" pitchFamily="34" charset="-122"/>
@@ -10335,7 +10402,7 @@
             <a:r>
               <a:rPr lang="ru-RU" sz="1400" dirty="0">
                 <a:solidFill>
-                  <a:srgbClr val="7D8393"/>
+                  <a:srgbClr val="F2F2F2"/>
                 </a:solidFill>
                 <a:latin typeface="Arial"/>
               </a:rPr>
@@ -10343,7 +10410,7 @@
             </a:r>
             <a:endParaRPr sz="1400" b="0" i="0" dirty="0">
               <a:solidFill>
-                <a:srgbClr val="7D8393"/>
+                <a:srgbClr val="F2F2F2"/>
               </a:solidFill>
               <a:latin typeface="Arial"/>
             </a:endParaRPr>
@@ -10351,6 +10418,11 @@
         </p:txBody>
       </p:sp>
     </p:spTree>
+    <p:extLst>
+      <p:ext uri="{BB962C8B-B14F-4D97-AF65-F5344CB8AC3E}">
+        <p14:creationId xmlns:p14="http://schemas.microsoft.com/office/powerpoint/2010/main" val="2064205584"/>
+      </p:ext>
+    </p:extLst>
   </p:cSld>
   <p:clrMapOvr>
     <a:masterClrMapping/>
@@ -10512,7 +10584,7 @@
             <a:r>
               <a:rPr lang="en-US" sz="1300" dirty="0">
                 <a:solidFill>
-                  <a:srgbClr val="B7BCC7"/>
+                  <a:srgbClr val="F2F2F2"/>
                 </a:solidFill>
                 <a:latin typeface="Arial" pitchFamily="34" charset="0"/>
                 <a:ea typeface="Arial" pitchFamily="34" charset="-122"/>
@@ -10680,7 +10752,7 @@
             <a:r>
               <a:rPr lang="en-US" sz="1050" kern="0" spc="50" dirty="0">
                 <a:solidFill>
-                  <a:srgbClr val="7D8393"/>
+                  <a:srgbClr val="F2F2F2"/>
                 </a:solidFill>
                 <a:latin typeface="Arial" pitchFamily="34" charset="0"/>
                 <a:ea typeface="Arial" pitchFamily="34" charset="-122"/>
@@ -10882,7 +10954,7 @@
             <a:r>
               <a:rPr lang="en-US" sz="1100" dirty="0">
                 <a:solidFill>
-                  <a:srgbClr val="B7BCC7"/>
+                  <a:srgbClr val="F2F2F2"/>
                 </a:solidFill>
                 <a:latin typeface="Arial" pitchFamily="34" charset="0"/>
                 <a:ea typeface="Arial" pitchFamily="34" charset="-122"/>
@@ -10983,7 +11055,7 @@
             <a:r>
               <a:rPr lang="en-US" sz="1100" dirty="0">
                 <a:solidFill>
-                  <a:srgbClr val="B7BCC7"/>
+                  <a:srgbClr val="F2F2F2"/>
                 </a:solidFill>
                 <a:latin typeface="Arial" pitchFamily="34" charset="0"/>
                 <a:ea typeface="Arial" pitchFamily="34" charset="-122"/>
@@ -11084,7 +11156,7 @@
             <a:r>
               <a:rPr lang="en-US" sz="1100" dirty="0">
                 <a:solidFill>
-                  <a:srgbClr val="B7BCC7"/>
+                  <a:srgbClr val="F2F2F2"/>
                 </a:solidFill>
                 <a:latin typeface="Arial" pitchFamily="34" charset="0"/>
                 <a:ea typeface="Arial" pitchFamily="34" charset="-122"/>
@@ -11325,7 +11397,7 @@
             <a:r>
               <a:rPr lang="en-US" sz="1050" kern="0" spc="50" dirty="0">
                 <a:solidFill>
-                  <a:srgbClr val="7D8393"/>
+                  <a:srgbClr val="F2F2F2"/>
                 </a:solidFill>
                 <a:latin typeface="Arial" pitchFamily="34" charset="0"/>
                 <a:ea typeface="Arial" pitchFamily="34" charset="-122"/>
@@ -11527,7 +11599,7 @@
             <a:r>
               <a:rPr lang="en-US" sz="1100" dirty="0">
                 <a:solidFill>
-                  <a:srgbClr val="B7BCC7"/>
+                  <a:srgbClr val="F2F2F2"/>
                 </a:solidFill>
                 <a:latin typeface="Arial" pitchFamily="34" charset="0"/>
                 <a:ea typeface="Arial" pitchFamily="34" charset="-122"/>
@@ -11628,7 +11700,7 @@
             <a:r>
               <a:rPr lang="en-US" sz="1100" dirty="0">
                 <a:solidFill>
-                  <a:srgbClr val="B7BCC7"/>
+                  <a:srgbClr val="F2F2F2"/>
                 </a:solidFill>
                 <a:latin typeface="Arial" pitchFamily="34" charset="0"/>
                 <a:ea typeface="Arial" pitchFamily="34" charset="-122"/>
@@ -11729,7 +11801,7 @@
             <a:r>
               <a:rPr lang="en-US" sz="1100" dirty="0">
                 <a:solidFill>
-                  <a:srgbClr val="B7BCC7"/>
+                  <a:srgbClr val="F2F2F2"/>
                 </a:solidFill>
                 <a:latin typeface="Arial" pitchFamily="34" charset="0"/>
                 <a:ea typeface="Arial" pitchFamily="34" charset="-122"/>
@@ -11977,7 +12049,7 @@
             <a:r>
               <a:rPr lang="en-US" sz="1050" kern="0" spc="50" dirty="0">
                 <a:solidFill>
-                  <a:srgbClr val="7D8393"/>
+                  <a:srgbClr val="F2F2F2"/>
                 </a:solidFill>
                 <a:latin typeface="Arial" pitchFamily="34" charset="0"/>
                 <a:ea typeface="Arial" pitchFamily="34" charset="-122"/>
@@ -12179,7 +12251,7 @@
             <a:r>
               <a:rPr lang="en-US" sz="1100" dirty="0">
                 <a:solidFill>
-                  <a:srgbClr val="B7BCC7"/>
+                  <a:srgbClr val="F2F2F2"/>
                 </a:solidFill>
                 <a:latin typeface="Arial" pitchFamily="34" charset="0"/>
                 <a:ea typeface="Arial" pitchFamily="34" charset="-122"/>
@@ -12280,7 +12352,7 @@
             <a:r>
               <a:rPr lang="en-US" sz="1100" dirty="0">
                 <a:solidFill>
-                  <a:srgbClr val="B7BCC7"/>
+                  <a:srgbClr val="F2F2F2"/>
                 </a:solidFill>
                 <a:latin typeface="Arial" pitchFamily="34" charset="0"/>
                 <a:ea typeface="Arial" pitchFamily="34" charset="-122"/>
@@ -12381,7 +12453,7 @@
             <a:r>
               <a:rPr lang="en-US" sz="1100" dirty="0">
                 <a:solidFill>
-                  <a:srgbClr val="B7BCC7"/>
+                  <a:srgbClr val="F2F2F2"/>
                 </a:solidFill>
                 <a:latin typeface="Arial" pitchFamily="34" charset="0"/>
                 <a:ea typeface="Arial" pitchFamily="34" charset="-122"/>
@@ -12501,7 +12573,7 @@
             <a:r>
               <a:rPr lang="ru-RU" sz="1400" b="0" i="0" dirty="0">
                 <a:solidFill>
-                  <a:srgbClr val="7D8393"/>
+                  <a:srgbClr val="F2F2F2"/>
                 </a:solidFill>
                 <a:latin typeface="Arial"/>
               </a:rPr>
@@ -12509,7 +12581,7 @@
             </a:r>
             <a:endParaRPr sz="1400" b="0" i="0" dirty="0">
               <a:solidFill>
-                <a:srgbClr val="7D8393"/>
+                <a:srgbClr val="F2F2F2"/>
               </a:solidFill>
               <a:latin typeface="Arial"/>
             </a:endParaRPr>
@@ -12517,6 +12589,11 @@
         </p:txBody>
       </p:sp>
     </p:spTree>
+    <p:extLst>
+      <p:ext uri="{BB962C8B-B14F-4D97-AF65-F5344CB8AC3E}">
+        <p14:creationId xmlns:p14="http://schemas.microsoft.com/office/powerpoint/2010/main" val="2520826066"/>
+      </p:ext>
+    </p:extLst>
   </p:cSld>
   <p:clrMapOvr>
     <a:masterClrMapping/>
@@ -12678,7 +12755,7 @@
             <a:r>
               <a:rPr lang="en-US" sz="1300" dirty="0">
                 <a:solidFill>
-                  <a:srgbClr val="B7BCC7"/>
+                  <a:srgbClr val="F2F2F2"/>
                 </a:solidFill>
                 <a:latin typeface="Arial" pitchFamily="34" charset="0"/>
                 <a:ea typeface="Arial" pitchFamily="34" charset="-122"/>
@@ -12929,7 +13006,7 @@
             <a:r>
               <a:rPr lang="en-US" sz="950" kern="0" spc="50" dirty="0">
                 <a:solidFill>
-                  <a:srgbClr val="B7BCC7"/>
+                  <a:srgbClr val="F2F2F2"/>
                 </a:solidFill>
                 <a:latin typeface="Arial" pitchFamily="34" charset="0"/>
                 <a:ea typeface="Arial" pitchFamily="34" charset="-122"/>
@@ -12991,7 +13068,7 @@
             <a:r>
               <a:rPr lang="en-US" sz="1100" dirty="0">
                 <a:solidFill>
-                  <a:srgbClr val="B7BCC7"/>
+                  <a:srgbClr val="F2F2F2"/>
                 </a:solidFill>
                 <a:latin typeface="Arial" pitchFamily="34" charset="0"/>
                 <a:ea typeface="Arial" pitchFamily="34" charset="-122"/>
@@ -13053,7 +13130,7 @@
             <a:r>
               <a:rPr lang="en-US" sz="1100" dirty="0">
                 <a:solidFill>
-                  <a:srgbClr val="B7BCC7"/>
+                  <a:srgbClr val="F2F2F2"/>
                 </a:solidFill>
                 <a:latin typeface="Arial" pitchFamily="34" charset="0"/>
                 <a:ea typeface="Arial" pitchFamily="34" charset="-122"/>
@@ -13115,7 +13192,7 @@
             <a:r>
               <a:rPr lang="en-US" sz="1100" dirty="0">
                 <a:solidFill>
-                  <a:srgbClr val="B7BCC7"/>
+                  <a:srgbClr val="F2F2F2"/>
                 </a:solidFill>
                 <a:latin typeface="Arial" pitchFamily="34" charset="0"/>
                 <a:ea typeface="Arial" pitchFamily="34" charset="-122"/>
@@ -13177,7 +13254,7 @@
             <a:r>
               <a:rPr lang="en-US" sz="1100" dirty="0">
                 <a:solidFill>
-                  <a:srgbClr val="B7BCC7"/>
+                  <a:srgbClr val="F2F2F2"/>
                 </a:solidFill>
                 <a:latin typeface="Arial" pitchFamily="34" charset="0"/>
                 <a:ea typeface="Arial" pitchFamily="34" charset="-122"/>
@@ -13498,7 +13575,7 @@
             <a:r>
               <a:rPr lang="en-US" sz="950" kern="0" spc="50" dirty="0">
                 <a:solidFill>
-                  <a:srgbClr val="B7BCC7"/>
+                  <a:srgbClr val="F2F2F2"/>
                 </a:solidFill>
                 <a:latin typeface="Arial" pitchFamily="34" charset="0"/>
                 <a:ea typeface="Arial" pitchFamily="34" charset="-122"/>
@@ -13560,7 +13637,7 @@
             <a:r>
               <a:rPr lang="en-US" sz="1100" dirty="0">
                 <a:solidFill>
-                  <a:srgbClr val="B7BCC7"/>
+                  <a:srgbClr val="F2F2F2"/>
                 </a:solidFill>
                 <a:latin typeface="Arial" pitchFamily="34" charset="0"/>
                 <a:ea typeface="Arial" pitchFamily="34" charset="-122"/>
@@ -13622,7 +13699,7 @@
             <a:r>
               <a:rPr lang="en-US" sz="1100" dirty="0">
                 <a:solidFill>
-                  <a:srgbClr val="B7BCC7"/>
+                  <a:srgbClr val="F2F2F2"/>
                 </a:solidFill>
                 <a:latin typeface="Arial" pitchFamily="34" charset="0"/>
                 <a:ea typeface="Arial" pitchFamily="34" charset="-122"/>
@@ -13684,7 +13761,7 @@
             <a:r>
               <a:rPr lang="en-US" sz="1100" dirty="0">
                 <a:solidFill>
-                  <a:srgbClr val="B7BCC7"/>
+                  <a:srgbClr val="F2F2F2"/>
                 </a:solidFill>
                 <a:latin typeface="Arial" pitchFamily="34" charset="0"/>
                 <a:ea typeface="Arial" pitchFamily="34" charset="-122"/>
@@ -13746,7 +13823,7 @@
             <a:r>
               <a:rPr lang="en-US" sz="1100" dirty="0">
                 <a:solidFill>
-                  <a:srgbClr val="B7BCC7"/>
+                  <a:srgbClr val="F2F2F2"/>
                 </a:solidFill>
                 <a:latin typeface="Arial" pitchFamily="34" charset="0"/>
                 <a:ea typeface="Arial" pitchFamily="34" charset="-122"/>
@@ -14067,7 +14144,7 @@
             <a:r>
               <a:rPr lang="en-US" sz="950" kern="0" spc="50" dirty="0">
                 <a:solidFill>
-                  <a:srgbClr val="B7BCC7"/>
+                  <a:srgbClr val="F2F2F2"/>
                 </a:solidFill>
                 <a:latin typeface="Arial" pitchFamily="34" charset="0"/>
                 <a:ea typeface="Arial" pitchFamily="34" charset="-122"/>
@@ -14129,7 +14206,7 @@
             <a:r>
               <a:rPr lang="en-US" sz="1100" dirty="0">
                 <a:solidFill>
-                  <a:srgbClr val="B7BCC7"/>
+                  <a:srgbClr val="F2F2F2"/>
                 </a:solidFill>
                 <a:latin typeface="Arial" pitchFamily="34" charset="0"/>
                 <a:ea typeface="Arial" pitchFamily="34" charset="-122"/>
@@ -14191,7 +14268,7 @@
             <a:r>
               <a:rPr lang="en-US" sz="1100" dirty="0">
                 <a:solidFill>
-                  <a:srgbClr val="B7BCC7"/>
+                  <a:srgbClr val="F2F2F2"/>
                 </a:solidFill>
                 <a:latin typeface="Arial" pitchFamily="34" charset="0"/>
                 <a:ea typeface="Arial" pitchFamily="34" charset="-122"/>
@@ -14253,7 +14330,7 @@
             <a:r>
               <a:rPr lang="en-US" sz="1100" dirty="0">
                 <a:solidFill>
-                  <a:srgbClr val="B7BCC7"/>
+                  <a:srgbClr val="F2F2F2"/>
                 </a:solidFill>
                 <a:latin typeface="Arial" pitchFamily="34" charset="0"/>
                 <a:ea typeface="Arial" pitchFamily="34" charset="-122"/>
@@ -14315,7 +14392,7 @@
             <a:r>
               <a:rPr lang="en-US" sz="1100" dirty="0">
                 <a:solidFill>
-                  <a:srgbClr val="B7BCC7"/>
+                  <a:srgbClr val="F2F2F2"/>
                 </a:solidFill>
                 <a:latin typeface="Arial" pitchFamily="34" charset="0"/>
                 <a:ea typeface="Arial" pitchFamily="34" charset="-122"/>
@@ -14641,7 +14718,7 @@
             <a:r>
               <a:rPr lang="ru-RU" sz="1400" dirty="0">
                 <a:solidFill>
-                  <a:srgbClr val="7D8393"/>
+                  <a:srgbClr val="F2F2F2"/>
                 </a:solidFill>
                 <a:latin typeface="Arial"/>
               </a:rPr>
@@ -14649,7 +14726,7 @@
             </a:r>
             <a:endParaRPr sz="1400" b="0" i="0" dirty="0">
               <a:solidFill>
-                <a:srgbClr val="7D8393"/>
+                <a:srgbClr val="F2F2F2"/>
               </a:solidFill>
               <a:latin typeface="Arial"/>
             </a:endParaRPr>
@@ -14657,6 +14734,11 @@
         </p:txBody>
       </p:sp>
     </p:spTree>
+    <p:extLst>
+      <p:ext uri="{BB962C8B-B14F-4D97-AF65-F5344CB8AC3E}">
+        <p14:creationId xmlns:p14="http://schemas.microsoft.com/office/powerpoint/2010/main" val="81864103"/>
+      </p:ext>
+    </p:extLst>
   </p:cSld>
   <p:clrMapOvr>
     <a:masterClrMapping/>
@@ -15021,7 +15103,7 @@
             <a:r>
               <a:rPr lang="uk-UA" sz="1100" b="1" kern="0" spc="200" noProof="1">
                 <a:solidFill>
-                  <a:srgbClr val="7D8393"/>
+                  <a:srgbClr val="F2F2F2"/>
                 </a:solidFill>
                 <a:latin typeface="Arial" pitchFamily="34" charset="0"/>
                 <a:ea typeface="Arial" pitchFamily="34" charset="-122"/>
@@ -15163,7 +15245,7 @@
             <a:r>
               <a:rPr lang="uk-UA" sz="1300" noProof="1">
                 <a:solidFill>
-                  <a:srgbClr val="B7BCC7"/>
+                  <a:srgbClr val="F2F2F2"/>
                 </a:solidFill>
                 <a:latin typeface="Arial" pitchFamily="34" charset="0"/>
                 <a:ea typeface="Arial" pitchFamily="34" charset="-122"/>
@@ -15273,7 +15355,7 @@
             <a:r>
               <a:rPr lang="uk-UA" sz="1300" noProof="1">
                 <a:solidFill>
-                  <a:srgbClr val="B7BCC7"/>
+                  <a:srgbClr val="F2F2F2"/>
                 </a:solidFill>
                 <a:latin typeface="Arial" pitchFamily="34" charset="0"/>
                 <a:ea typeface="Arial" pitchFamily="34" charset="-122"/>
@@ -15383,7 +15465,7 @@
             <a:r>
               <a:rPr lang="uk-UA" sz="1300" noProof="1">
                 <a:solidFill>
-                  <a:srgbClr val="B7BCC7"/>
+                  <a:srgbClr val="F2F2F2"/>
                 </a:solidFill>
                 <a:latin typeface="Arial" pitchFamily="34" charset="0"/>
                 <a:ea typeface="Arial" pitchFamily="34" charset="-122"/>
@@ -15493,7 +15575,7 @@
             <a:r>
               <a:rPr lang="uk-UA" sz="1300" noProof="1">
                 <a:solidFill>
-                  <a:srgbClr val="B7BCC7"/>
+                  <a:srgbClr val="F2F2F2"/>
                 </a:solidFill>
                 <a:latin typeface="Arial" pitchFamily="34" charset="0"/>
                 <a:ea typeface="Arial" pitchFamily="34" charset="-122"/>
@@ -15603,7 +15685,7 @@
             <a:r>
               <a:rPr lang="uk-UA" sz="1300" noProof="1">
                 <a:solidFill>
-                  <a:srgbClr val="B7BCC7"/>
+                  <a:srgbClr val="F2F2F2"/>
                 </a:solidFill>
                 <a:latin typeface="Arial" pitchFamily="34" charset="0"/>
                 <a:ea typeface="Arial" pitchFamily="34" charset="-122"/>
@@ -15650,7 +15732,7 @@
             <a:r>
               <a:rPr lang="ru-RU" sz="1400" b="0" i="0" dirty="0">
                 <a:solidFill>
-                  <a:srgbClr val="7D8393"/>
+                  <a:srgbClr val="F2F2F2"/>
                 </a:solidFill>
                 <a:latin typeface="Arial"/>
               </a:rPr>
@@ -15658,7 +15740,7 @@
             </a:r>
             <a:endParaRPr sz="1400" b="0" i="0" dirty="0">
               <a:solidFill>
-                <a:srgbClr val="7D8393"/>
+                <a:srgbClr val="F2F2F2"/>
               </a:solidFill>
               <a:latin typeface="Arial"/>
             </a:endParaRPr>
@@ -15666,6 +15748,11 @@
         </p:txBody>
       </p:sp>
     </p:spTree>
+    <p:extLst>
+      <p:ext uri="{BB962C8B-B14F-4D97-AF65-F5344CB8AC3E}">
+        <p14:creationId xmlns:p14="http://schemas.microsoft.com/office/powerpoint/2010/main" val="2493554429"/>
+      </p:ext>
+    </p:extLst>
   </p:cSld>
   <p:clrMapOvr>
     <a:masterClrMapping/>
@@ -15834,7 +15921,7 @@
             <a:r>
               <a:rPr lang="uk-UA" sz="1250" noProof="1">
                 <a:solidFill>
-                  <a:srgbClr val="B7BCC7"/>
+                  <a:srgbClr val="F2F2F2"/>
                 </a:solidFill>
                 <a:latin typeface="Arial" pitchFamily="34" charset="0"/>
                 <a:ea typeface="Arial" pitchFamily="34" charset="-122"/>
@@ -16031,7 +16118,7 @@
             <a:r>
               <a:rPr lang="uk-UA" sz="1050" noProof="1">
                 <a:solidFill>
-                  <a:srgbClr val="B7BCC7"/>
+                  <a:srgbClr val="F2F2F2"/>
                 </a:solidFill>
                 <a:latin typeface="Arial" pitchFamily="34" charset="0"/>
                 <a:ea typeface="Arial" pitchFamily="34" charset="-122"/>
@@ -16153,7 +16240,7 @@
             <a:r>
               <a:rPr lang="uk-UA" sz="1050" noProof="1">
                 <a:solidFill>
-                  <a:srgbClr val="B7BCC7"/>
+                  <a:srgbClr val="F2F2F2"/>
                 </a:solidFill>
                 <a:latin typeface="Arial" pitchFamily="34" charset="0"/>
                 <a:ea typeface="Arial" pitchFamily="34" charset="-122"/>
@@ -16275,7 +16362,7 @@
             <a:r>
               <a:rPr lang="uk-UA" sz="1050" noProof="1">
                 <a:solidFill>
-                  <a:srgbClr val="B7BCC7"/>
+                  <a:srgbClr val="F2F2F2"/>
                 </a:solidFill>
                 <a:latin typeface="Arial" pitchFamily="34" charset="0"/>
                 <a:ea typeface="Arial" pitchFamily="34" charset="-122"/>
@@ -16397,7 +16484,7 @@
             <a:r>
               <a:rPr lang="uk-UA" sz="1050" noProof="1">
                 <a:solidFill>
-                  <a:srgbClr val="B7BCC7"/>
+                  <a:srgbClr val="F2F2F2"/>
                 </a:solidFill>
                 <a:latin typeface="Arial" pitchFamily="34" charset="0"/>
                 <a:ea typeface="Arial" pitchFamily="34" charset="-122"/>
@@ -16519,7 +16606,7 @@
             <a:r>
               <a:rPr lang="uk-UA" sz="1050" noProof="1">
                 <a:solidFill>
-                  <a:srgbClr val="B7BCC7"/>
+                  <a:srgbClr val="F2F2F2"/>
                 </a:solidFill>
                 <a:latin typeface="Arial" pitchFamily="34" charset="0"/>
                 <a:ea typeface="Arial" pitchFamily="34" charset="-122"/>
@@ -16641,7 +16728,7 @@
             <a:r>
               <a:rPr lang="uk-UA" sz="1050" noProof="1">
                 <a:solidFill>
-                  <a:srgbClr val="B7BCC7"/>
+                  <a:srgbClr val="F2F2F2"/>
                 </a:solidFill>
                 <a:latin typeface="Arial" pitchFamily="34" charset="0"/>
                 <a:ea typeface="Arial" pitchFamily="34" charset="-122"/>
@@ -16788,7 +16875,7 @@
             <a:r>
               <a:rPr lang="uk-UA" sz="850" b="1" noProof="1">
                 <a:solidFill>
-                  <a:srgbClr val="7D8393"/>
+                  <a:srgbClr val="F2F2F2"/>
                 </a:solidFill>
                 <a:latin typeface="Arial" pitchFamily="34" charset="0"/>
                 <a:ea typeface="Arial" pitchFamily="34" charset="-122"/>
@@ -16869,7 +16956,7 @@
             <a:r>
               <a:rPr lang="uk-UA" sz="1050" noProof="1">
                 <a:solidFill>
-                  <a:srgbClr val="B7BCC7"/>
+                  <a:srgbClr val="F2F2F2"/>
                 </a:solidFill>
                 <a:latin typeface="Arial" pitchFamily="34" charset="0"/>
                 <a:ea typeface="Arial" pitchFamily="34" charset="-122"/>
@@ -16993,7 +17080,7 @@
             <a:r>
               <a:rPr lang="uk-UA" sz="1050" noProof="1">
                 <a:solidFill>
-                  <a:srgbClr val="B7BCC7"/>
+                  <a:srgbClr val="F2F2F2"/>
                 </a:solidFill>
                 <a:latin typeface="Arial" pitchFamily="34" charset="0"/>
                 <a:ea typeface="Arial" pitchFamily="34" charset="-122"/>
@@ -17117,7 +17204,7 @@
             <a:r>
               <a:rPr lang="uk-UA" sz="1050" noProof="1">
                 <a:solidFill>
-                  <a:srgbClr val="B7BCC7"/>
+                  <a:srgbClr val="F2F2F2"/>
                 </a:solidFill>
                 <a:latin typeface="Arial" pitchFamily="34" charset="0"/>
                 <a:ea typeface="Arial" pitchFamily="34" charset="-122"/>
@@ -17241,7 +17328,7 @@
             <a:r>
               <a:rPr lang="uk-UA" sz="1050" noProof="1">
                 <a:solidFill>
-                  <a:srgbClr val="B7BCC7"/>
+                  <a:srgbClr val="F2F2F2"/>
                 </a:solidFill>
                 <a:latin typeface="Arial" pitchFamily="34" charset="0"/>
                 <a:ea typeface="Arial" pitchFamily="34" charset="-122"/>
@@ -17365,7 +17452,7 @@
             <a:r>
               <a:rPr lang="uk-UA" sz="1050" noProof="1">
                 <a:solidFill>
-                  <a:srgbClr val="B7BCC7"/>
+                  <a:srgbClr val="F2F2F2"/>
                 </a:solidFill>
                 <a:latin typeface="Arial" pitchFamily="34" charset="0"/>
                 <a:ea typeface="Arial" pitchFamily="34" charset="-122"/>
@@ -17412,7 +17499,7 @@
             <a:r>
               <a:rPr lang="uk-UA" sz="1400" b="0" i="0" noProof="1">
                 <a:solidFill>
-                  <a:srgbClr val="7D8393"/>
+                  <a:srgbClr val="F2F2F2"/>
                 </a:solidFill>
                 <a:latin typeface="Arial"/>
               </a:rPr>
@@ -17422,6 +17509,11 @@
         </p:txBody>
       </p:sp>
     </p:spTree>
+    <p:extLst>
+      <p:ext uri="{BB962C8B-B14F-4D97-AF65-F5344CB8AC3E}">
+        <p14:creationId xmlns:p14="http://schemas.microsoft.com/office/powerpoint/2010/main" val="3141252248"/>
+      </p:ext>
+    </p:extLst>
   </p:cSld>
   <p:clrMapOvr>
     <a:masterClrMapping/>
@@ -17590,7 +17682,7 @@
             <a:r>
               <a:rPr lang="en-US" sz="1300" dirty="0">
                 <a:solidFill>
-                  <a:srgbClr val="B7BCC7"/>
+                  <a:srgbClr val="F2F2F2"/>
                 </a:solidFill>
                 <a:latin typeface="Arial" pitchFamily="34" charset="0"/>
                 <a:ea typeface="Arial" pitchFamily="34" charset="-122"/>
@@ -17665,7 +17757,7 @@
             <a:r>
               <a:rPr lang="en-US" sz="1050" b="1" kern="0" spc="150" dirty="0">
                 <a:solidFill>
-                  <a:srgbClr val="7D8393"/>
+                  <a:srgbClr val="F2F2F2"/>
                 </a:solidFill>
                 <a:latin typeface="Arial" pitchFamily="34" charset="0"/>
                 <a:ea typeface="Arial" pitchFamily="34" charset="-122"/>
@@ -17732,7 +17824,7 @@
             <a:r>
               <a:rPr lang="en-US" sz="1000" i="1" dirty="0">
                 <a:solidFill>
-                  <a:srgbClr val="7D8393"/>
+                  <a:srgbClr val="F2F2F2"/>
                 </a:solidFill>
                 <a:latin typeface="Arial" pitchFamily="34" charset="0"/>
                 <a:ea typeface="Arial" pitchFamily="34" charset="-122"/>
@@ -18011,7 +18103,7 @@
             <a:r>
               <a:rPr lang="en-US" sz="1100" dirty="0">
                 <a:solidFill>
-                  <a:srgbClr val="B7BCC7"/>
+                  <a:srgbClr val="F2F2F2"/>
                 </a:solidFill>
                 <a:latin typeface="Arial" pitchFamily="34" charset="0"/>
                 <a:ea typeface="Arial" pitchFamily="34" charset="-122"/>
@@ -18077,7 +18169,7 @@
             <a:r>
               <a:rPr lang="en-US" sz="1100" dirty="0">
                 <a:solidFill>
-                  <a:srgbClr val="B7BCC7"/>
+                  <a:srgbClr val="F2F2F2"/>
                 </a:solidFill>
                 <a:latin typeface="Arial" pitchFamily="34" charset="0"/>
                 <a:ea typeface="Arial" pitchFamily="34" charset="-122"/>
@@ -18143,7 +18235,7 @@
             <a:r>
               <a:rPr lang="en-US" sz="1100" dirty="0">
                 <a:solidFill>
-                  <a:srgbClr val="B7BCC7"/>
+                  <a:srgbClr val="F2F2F2"/>
                 </a:solidFill>
                 <a:latin typeface="Arial" pitchFamily="34" charset="0"/>
                 <a:ea typeface="Arial" pitchFamily="34" charset="-122"/>
@@ -18422,7 +18514,7 @@
             <a:r>
               <a:rPr lang="en-US" sz="1100" dirty="0">
                 <a:solidFill>
-                  <a:srgbClr val="B7BCC7"/>
+                  <a:srgbClr val="F2F2F2"/>
                 </a:solidFill>
                 <a:latin typeface="Arial" pitchFamily="34" charset="0"/>
                 <a:ea typeface="Arial" pitchFamily="34" charset="-122"/>
@@ -18488,7 +18580,7 @@
             <a:r>
               <a:rPr lang="en-US" sz="1100" dirty="0">
                 <a:solidFill>
-                  <a:srgbClr val="B7BCC7"/>
+                  <a:srgbClr val="F2F2F2"/>
                 </a:solidFill>
                 <a:latin typeface="Arial" pitchFamily="34" charset="0"/>
                 <a:ea typeface="Arial" pitchFamily="34" charset="-122"/>
@@ -18554,7 +18646,7 @@
             <a:r>
               <a:rPr lang="en-US" sz="1100" dirty="0">
                 <a:solidFill>
-                  <a:srgbClr val="B7BCC7"/>
+                  <a:srgbClr val="F2F2F2"/>
                 </a:solidFill>
                 <a:latin typeface="Arial" pitchFamily="34" charset="0"/>
                 <a:ea typeface="Arial" pitchFamily="34" charset="-122"/>
@@ -18833,7 +18925,7 @@
             <a:r>
               <a:rPr lang="en-US" sz="1100" dirty="0">
                 <a:solidFill>
-                  <a:srgbClr val="B7BCC7"/>
+                  <a:srgbClr val="F2F2F2"/>
                 </a:solidFill>
                 <a:latin typeface="Arial" pitchFamily="34" charset="0"/>
                 <a:ea typeface="Arial" pitchFamily="34" charset="-122"/>
@@ -18899,7 +18991,7 @@
             <a:r>
               <a:rPr lang="en-US" sz="1100" dirty="0">
                 <a:solidFill>
-                  <a:srgbClr val="B7BCC7"/>
+                  <a:srgbClr val="F2F2F2"/>
                 </a:solidFill>
                 <a:latin typeface="Arial" pitchFamily="34" charset="0"/>
                 <a:ea typeface="Arial" pitchFamily="34" charset="-122"/>
@@ -18965,7 +19057,7 @@
             <a:r>
               <a:rPr lang="en-US" sz="1100" dirty="0">
                 <a:solidFill>
-                  <a:srgbClr val="B7BCC7"/>
+                  <a:srgbClr val="F2F2F2"/>
                 </a:solidFill>
                 <a:latin typeface="Arial" pitchFamily="34" charset="0"/>
                 <a:ea typeface="Arial" pitchFamily="34" charset="-122"/>
@@ -19031,7 +19123,7 @@
             <a:r>
               <a:rPr lang="en-US" sz="1100" dirty="0">
                 <a:solidFill>
-                  <a:srgbClr val="B7BCC7"/>
+                  <a:srgbClr val="F2F2F2"/>
                 </a:solidFill>
                 <a:latin typeface="Arial" pitchFamily="34" charset="0"/>
                 <a:ea typeface="Arial" pitchFamily="34" charset="-122"/>
@@ -19097,7 +19189,7 @@
             <a:r>
               <a:rPr lang="en-US" sz="1100" dirty="0">
                 <a:solidFill>
-                  <a:srgbClr val="B7BCC7"/>
+                  <a:srgbClr val="F2F2F2"/>
                 </a:solidFill>
                 <a:latin typeface="Arial" pitchFamily="34" charset="0"/>
                 <a:ea typeface="Arial" pitchFamily="34" charset="-122"/>
@@ -19144,7 +19236,7 @@
             <a:r>
               <a:rPr lang="ru-RU" sz="1400" dirty="0">
                 <a:solidFill>
-                  <a:srgbClr val="7D8393"/>
+                  <a:srgbClr val="F2F2F2"/>
                 </a:solidFill>
                 <a:latin typeface="Arial"/>
               </a:rPr>
@@ -19152,7 +19244,7 @@
             </a:r>
             <a:endParaRPr sz="1400" b="0" i="0" dirty="0">
               <a:solidFill>
-                <a:srgbClr val="7D8393"/>
+                <a:srgbClr val="F2F2F2"/>
               </a:solidFill>
               <a:latin typeface="Arial"/>
             </a:endParaRPr>
@@ -19160,6 +19252,11 @@
         </p:txBody>
       </p:sp>
     </p:spTree>
+    <p:extLst>
+      <p:ext uri="{BB962C8B-B14F-4D97-AF65-F5344CB8AC3E}">
+        <p14:creationId xmlns:p14="http://schemas.microsoft.com/office/powerpoint/2010/main" val="2828468850"/>
+      </p:ext>
+    </p:extLst>
   </p:cSld>
   <p:clrMapOvr>
     <a:masterClrMapping/>
@@ -19328,7 +19425,7 @@
             <a:r>
               <a:rPr sz="1300" b="0" i="0">
                 <a:solidFill>
-                  <a:srgbClr val="B7BCC7"/>
+                  <a:srgbClr val="F2F2F2"/>
                 </a:solidFill>
                 <a:latin typeface="Arial"/>
               </a:rPr>
@@ -19411,7 +19508,7 @@
             <a:r>
               <a:rPr sz="1100" b="1" i="0">
                 <a:solidFill>
-                  <a:srgbClr val="7D8393"/>
+                  <a:srgbClr val="F2F2F2"/>
                 </a:solidFill>
                 <a:latin typeface="Arial"/>
               </a:rPr>
@@ -19447,7 +19544,7 @@
             <a:r>
               <a:rPr sz="1050" b="0" i="1">
                 <a:solidFill>
-                  <a:srgbClr val="7D8393"/>
+                  <a:srgbClr val="F2F2F2"/>
                 </a:solidFill>
                 <a:latin typeface="Arial"/>
               </a:rPr>
@@ -19623,7 +19720,7 @@
             <a:r>
               <a:rPr sz="930" b="0" i="0">
                 <a:solidFill>
-                  <a:srgbClr val="B7BCC7"/>
+                  <a:srgbClr val="F2F2F2"/>
                 </a:solidFill>
                 <a:latin typeface="Arial"/>
               </a:rPr>
@@ -19799,7 +19896,7 @@
             <a:r>
               <a:rPr sz="930" b="0" i="0">
                 <a:solidFill>
-                  <a:srgbClr val="B7BCC7"/>
+                  <a:srgbClr val="F2F2F2"/>
                 </a:solidFill>
                 <a:latin typeface="Arial"/>
               </a:rPr>
@@ -19975,7 +20072,7 @@
             <a:r>
               <a:rPr sz="930" b="0" i="0">
                 <a:solidFill>
-                  <a:srgbClr val="B7BCC7"/>
+                  <a:srgbClr val="F2F2F2"/>
                 </a:solidFill>
                 <a:latin typeface="Arial"/>
               </a:rPr>
@@ -20151,7 +20248,7 @@
             <a:r>
               <a:rPr sz="930" b="0" i="0">
                 <a:solidFill>
-                  <a:srgbClr val="B7BCC7"/>
+                  <a:srgbClr val="F2F2F2"/>
                 </a:solidFill>
                 <a:latin typeface="Arial"/>
               </a:rPr>
@@ -20327,7 +20424,7 @@
             <a:r>
               <a:rPr sz="930" b="0" i="0">
                 <a:solidFill>
-                  <a:srgbClr val="B7BCC7"/>
+                  <a:srgbClr val="F2F2F2"/>
                 </a:solidFill>
                 <a:latin typeface="Arial"/>
               </a:rPr>
@@ -20503,7 +20600,7 @@
             <a:r>
               <a:rPr sz="930" b="0" i="0">
                 <a:solidFill>
-                  <a:srgbClr val="B7BCC7"/>
+                  <a:srgbClr val="F2F2F2"/>
                 </a:solidFill>
                 <a:latin typeface="Arial"/>
               </a:rPr>
@@ -20577,7 +20674,7 @@
             <a:r>
               <a:rPr lang="ru-RU" sz="1400" b="0" i="0" dirty="0">
                 <a:solidFill>
-                  <a:srgbClr val="7D8393"/>
+                  <a:srgbClr val="F2F2F2"/>
                 </a:solidFill>
                 <a:latin typeface="Arial"/>
               </a:rPr>
@@ -20585,7 +20682,7 @@
             </a:r>
             <a:endParaRPr sz="1400" b="0" i="0" dirty="0">
               <a:solidFill>
-                <a:srgbClr val="7D8393"/>
+                <a:srgbClr val="F2F2F2"/>
               </a:solidFill>
               <a:latin typeface="Arial"/>
             </a:endParaRPr>
@@ -20593,6 +20690,11 @@
         </p:txBody>
       </p:sp>
     </p:spTree>
+    <p:extLst>
+      <p:ext uri="{BB962C8B-B14F-4D97-AF65-F5344CB8AC3E}">
+        <p14:creationId xmlns:p14="http://schemas.microsoft.com/office/powerpoint/2010/main" val="2451985689"/>
+      </p:ext>
+    </p:extLst>
   </p:cSld>
   <p:clrMapOvr>
     <a:masterClrMapping/>
@@ -20761,7 +20863,7 @@
             <a:r>
               <a:rPr lang="uk-UA" sz="1300" b="0" i="0" noProof="1">
                 <a:solidFill>
-                  <a:srgbClr val="B7BCC7"/>
+                  <a:srgbClr val="F2F2F2"/>
                 </a:solidFill>
                 <a:latin typeface="Arial"/>
               </a:rPr>
@@ -20844,7 +20946,7 @@
             <a:r>
               <a:rPr lang="uk-UA" sz="1100" b="1" i="0" noProof="1">
                 <a:solidFill>
-                  <a:srgbClr val="7D8393"/>
+                  <a:srgbClr val="F2F2F2"/>
                 </a:solidFill>
                 <a:latin typeface="Arial"/>
               </a:rPr>
@@ -20880,7 +20982,7 @@
             <a:r>
               <a:rPr lang="uk-UA" sz="1050" b="0" i="1" noProof="1">
                 <a:solidFill>
-                  <a:srgbClr val="7D8393"/>
+                  <a:srgbClr val="F2F2F2"/>
                 </a:solidFill>
                 <a:latin typeface="Arial"/>
               </a:rPr>
@@ -21048,7 +21150,7 @@
             <a:r>
               <a:rPr lang="uk-UA" sz="1030" b="0" i="0" noProof="1">
                 <a:solidFill>
-                  <a:srgbClr val="B7BCC7"/>
+                  <a:srgbClr val="F2F2F2"/>
                 </a:solidFill>
                 <a:latin typeface="Arial"/>
               </a:rPr>
@@ -21216,7 +21318,7 @@
             <a:r>
               <a:rPr lang="uk-UA" sz="1030" b="0" i="0" noProof="1">
                 <a:solidFill>
-                  <a:srgbClr val="B7BCC7"/>
+                  <a:srgbClr val="F2F2F2"/>
                 </a:solidFill>
                 <a:latin typeface="Arial"/>
               </a:rPr>
@@ -21384,7 +21486,7 @@
             <a:r>
               <a:rPr lang="uk-UA" sz="1030" b="0" i="0" noProof="1">
                 <a:solidFill>
-                  <a:srgbClr val="B7BCC7"/>
+                  <a:srgbClr val="F2F2F2"/>
                 </a:solidFill>
                 <a:latin typeface="Arial"/>
               </a:rPr>
@@ -21552,7 +21654,7 @@
             <a:r>
               <a:rPr lang="uk-UA" sz="1030" b="0" i="0" noProof="1">
                 <a:solidFill>
-                  <a:srgbClr val="B7BCC7"/>
+                  <a:srgbClr val="F2F2F2"/>
                 </a:solidFill>
                 <a:latin typeface="Arial"/>
               </a:rPr>
@@ -21626,7 +21728,7 @@
             <a:r>
               <a:rPr lang="uk-UA" sz="1400" b="0" i="0" noProof="1">
                 <a:solidFill>
-                  <a:srgbClr val="7D8393"/>
+                  <a:srgbClr val="F2F2F2"/>
                 </a:solidFill>
                 <a:latin typeface="Arial"/>
               </a:rPr>
@@ -21636,6 +21738,11 @@
         </p:txBody>
       </p:sp>
     </p:spTree>
+    <p:extLst>
+      <p:ext uri="{BB962C8B-B14F-4D97-AF65-F5344CB8AC3E}">
+        <p14:creationId xmlns:p14="http://schemas.microsoft.com/office/powerpoint/2010/main" val="1763549648"/>
+      </p:ext>
+    </p:extLst>
   </p:cSld>
   <p:clrMapOvr>
     <a:masterClrMapping/>
@@ -22235,7 +22342,7 @@
 
 <file path=ppt/webextensions/taskpanes.xml><?xml version="1.0" encoding="utf-8"?>
 <wetp:taskpanes xmlns:wetp="http://schemas.microsoft.com/office/webextensions/taskpanes/2010/11">
-  <wetp:taskpane dockstate="right" visibility="0" width="508" row="6">
+  <wetp:taskpane dockstate="right" visibility="0" width="535" row="0">
     <wetp:webextensionref xmlns:r="http://schemas.openxmlformats.org/officeDocument/2006/relationships" r:id="rId1"/>
   </wetp:taskpane>
 </wetp:taskpanes>
